--- a/data/09_internal_training/training_15.pptx
+++ b/data/09_internal_training/training_15.pptx
@@ -3140,51 +3140,51 @@
           <a:p/>
           <a:p>
             <a:r>
-              <a:t>风险管理部认为，机器人 行业仍然面临若干</a:t>
-            </a:r>
-          </a:p>
-          <a:p>
-            <a:r>
-              <a:t>不确定性因素，包括技术迭代风险、政策变化、</a:t>
-            </a:r>
-          </a:p>
-          <a:p>
-            <a:r>
-              <a:t>以及市场竞争加剧等问题。</a:t>
-            </a:r>
-          </a:p>
-          <a:p/>
-          <a:p/>
-          <a:p>
-            <a:r>
-              <a:t>华辰资本旗下的 HC Quant Arbitrage Fund 在最近的资产配置会议中</a:t>
-            </a:r>
-          </a:p>
-          <a:p>
-            <a:r>
-              <a:t>讨论了 消费科技 行业的投资机会，并对 和泰传媒有限公司</a:t>
+              <a:t>从产业链角度看，新能源 行业主要由上游设备厂商、</a:t>
+            </a:r>
+          </a:p>
+          <a:p>
+            <a:r>
+              <a:t>中游平台企业以及下游应用厂商组成。</a:t>
+            </a:r>
+          </a:p>
+          <a:p>
+            <a:r>
+              <a:t>浦华众城网络有限公司 主要位于产业链的 下游 环节。</a:t>
+            </a:r>
+          </a:p>
+          <a:p/>
+          <a:p/>
+          <a:p>
+            <a:r>
+              <a:t>根据内部财务模型测算，昂歌信息信息有限公司 在未来三年</a:t>
+            </a:r>
+          </a:p>
+          <a:p>
+            <a:r>
+              <a:t>收入复合增长率预计可达到 15% 左右。</a:t>
+            </a:r>
+          </a:p>
+          <a:p>
+            <a:r>
+              <a:t>该预测基于行业需求增长以及公司产能扩张计划。</a:t>
+            </a:r>
+          </a:p>
+          <a:p/>
+          <a:p/>
+          <a:p>
+            <a:r>
+              <a:t>华辰资本旗下的 HC Global Macro Fund 在最近的资产配置会议中</a:t>
+            </a:r>
+          </a:p>
+          <a:p>
+            <a:r>
+              <a:t>讨论了 人工智能 行业的投资机会，并对 明腾传媒有限公司</a:t>
             </a:r>
           </a:p>
           <a:p>
             <a:r>
               <a:t>进行了重点评估。</a:t>
-            </a:r>
-          </a:p>
-          <a:p/>
-          <a:p/>
-          <a:p>
-            <a:r>
-              <a:t>从产业链角度看，医疗科技 行业主要由上游设备厂商、</a:t>
-            </a:r>
-          </a:p>
-          <a:p>
-            <a:r>
-              <a:t>中游平台企业以及下游应用厂商组成。</a:t>
-            </a:r>
-          </a:p>
-          <a:p>
-            <a:r>
-              <a:t>创联世纪科技有限公司 主要位于产业链的 下游 环节。</a:t>
             </a:r>
           </a:p>
           <a:p/>
@@ -3246,29 +3246,12 @@
           <a:p/>
           <a:p>
             <a:r>
-              <a:t>根据内部财务模型测算，立信电子网络有限公司 在未来三年</a:t>
-            </a:r>
-          </a:p>
-          <a:p>
-            <a:r>
-              <a:t>收入复合增长率预计可达到 14% 左右。</a:t>
-            </a:r>
-          </a:p>
-          <a:p>
-            <a:r>
-              <a:t>该预测基于行业需求增长以及公司产能扩张计划。</a:t>
-            </a:r>
-          </a:p>
-          <a:p/>
-          <a:p/>
-          <a:p>
-            <a:r>
               <a:t>华辰资本旗下的 HC Quant Arbitrage Fund 在最近的资产配置会议中</a:t>
             </a:r>
           </a:p>
           <a:p>
             <a:r>
-              <a:t>讨论了 消费科技 行业的投资机会，并对 精芯信息有限公司</a:t>
+              <a:t>讨论了 云计算 行业的投资机会，并对 艾提科信科技有限公司</a:t>
             </a:r>
           </a:p>
           <a:p>
@@ -3280,17 +3263,34 @@
           <a:p/>
           <a:p>
             <a:r>
-              <a:t>根据内部财务模型测算，国讯网络有限公司 在未来三年</a:t>
-            </a:r>
-          </a:p>
-          <a:p>
-            <a:r>
-              <a:t>收入复合增长率预计可达到 19% 左右。</a:t>
-            </a:r>
-          </a:p>
-          <a:p>
-            <a:r>
-              <a:t>该预测基于行业需求增长以及公司产能扩张计划。</a:t>
+              <a:t>从产业链角度看，新能源 行业主要由上游设备厂商、</a:t>
+            </a:r>
+          </a:p>
+          <a:p>
+            <a:r>
+              <a:t>中游平台企业以及下游应用厂商组成。</a:t>
+            </a:r>
+          </a:p>
+          <a:p>
+            <a:r>
+              <a:t>创汇传媒有限公司 主要位于产业链的 上游 环节。</a:t>
+            </a:r>
+          </a:p>
+          <a:p/>
+          <a:p/>
+          <a:p>
+            <a:r>
+              <a:t>华辰资本旗下的 HC Alpha Growth Fund 在最近的资产配置会议中</a:t>
+            </a:r>
+          </a:p>
+          <a:p>
+            <a:r>
+              <a:t>讨论了 半导体 行业的投资机会，并对 中建创业科技有限公司</a:t>
+            </a:r>
+          </a:p>
+          <a:p>
+            <a:r>
+              <a:t>进行了重点评估。</a:t>
             </a:r>
           </a:p>
           <a:p/>
@@ -3352,61 +3352,56 @@
           <a:p/>
           <a:p>
             <a:r>
-              <a:t>迪摩科技有限公司 是中国 人工智能 行业的重要企业之一。</a:t>
-            </a:r>
-          </a:p>
-          <a:p>
-            <a:r>
-              <a:t>根据华辰资本 投资委员会 的研究，该公司成立于 2017 年，</a:t>
-            </a:r>
-          </a:p>
-          <a:p>
-            <a:r>
-              <a:t>目前员工规模约 7554 人。公司近年来持续加大研发投入，</a:t>
+              <a:t>华辰资本旗下的 HC Alpha Growth Fund 在最近的资产配置会议中</a:t>
+            </a:r>
+          </a:p>
+          <a:p>
+            <a:r>
+              <a:t>讨论了 云计算 行业的投资机会，并对 艾提科信科技有限公司</a:t>
+            </a:r>
+          </a:p>
+          <a:p>
+            <a:r>
+              <a:t>进行了重点评估。</a:t>
+            </a:r>
+          </a:p>
+          <a:p/>
+          <a:p/>
+          <a:p>
+            <a:r>
+              <a:t>华辰资本旗下的 HC Quant Arbitrage Fund 在最近的资产配置会议中</a:t>
+            </a:r>
+          </a:p>
+          <a:p>
+            <a:r>
+              <a:t>讨论了 机器人 行业的投资机会，并对 毕博诚信息有限公司</a:t>
+            </a:r>
+          </a:p>
+          <a:p>
+            <a:r>
+              <a:t>进行了重点评估。</a:t>
+            </a:r>
+          </a:p>
+          <a:p/>
+          <a:p/>
+          <a:p>
+            <a:r>
+              <a:t>通际名联网络有限公司 是中国 机器人 行业的重要企业之一。</a:t>
+            </a:r>
+          </a:p>
+          <a:p>
+            <a:r>
+              <a:t>根据华辰资本 风险管理部 的研究，该公司成立于 2016 年，</a:t>
+            </a:r>
+          </a:p>
+          <a:p>
+            <a:r>
+              <a:t>目前员工规模约 3310 人。公司近年来持续加大研发投入，</a:t>
             </a:r>
           </a:p>
           <a:p>
             <a:r>
               <a:t>在核心技术方面形成了较强的竞争壁垒。</a:t>
-            </a:r>
-          </a:p>
-          <a:p/>
-          <a:p/>
-          <a:p>
-            <a:r>
-              <a:t>雨林木风计算机科技有限公司 是中国 人工智能 行业的重要企业之一。</a:t>
-            </a:r>
-          </a:p>
-          <a:p>
-            <a:r>
-              <a:t>根据华辰资本 量化研究部 的研究，该公司成立于 2019 年，</a:t>
-            </a:r>
-          </a:p>
-          <a:p>
-            <a:r>
-              <a:t>目前员工规模约 1578 人。公司近年来持续加大研发投入，</a:t>
-            </a:r>
-          </a:p>
-          <a:p>
-            <a:r>
-              <a:t>在核心技术方面形成了较强的竞争壁垒。</a:t>
-            </a:r>
-          </a:p>
-          <a:p/>
-          <a:p/>
-          <a:p>
-            <a:r>
-              <a:t>华辰资本旗下的 HC Energy Transition Fund 在最近的资产配置会议中</a:t>
-            </a:r>
-          </a:p>
-          <a:p>
-            <a:r>
-              <a:t>讨论了 新能源 行业的投资机会，并对 鸿睿思博网络有限公司</a:t>
-            </a:r>
-          </a:p>
-          <a:p>
-            <a:r>
-              <a:t>进行了重点评估。</a:t>
             </a:r>
           </a:p>
           <a:p/>
@@ -3468,12 +3463,12 @@
           <a:p/>
           <a:p>
             <a:r>
-              <a:t>华辰资本旗下的 HC Quant Arbitrage Fund 在最近的资产配置会议中</a:t>
-            </a:r>
-          </a:p>
-          <a:p>
-            <a:r>
-              <a:t>讨论了 机器人 行业的投资机会，并对 济南亿次元网络有限公司</a:t>
+              <a:t>华辰资本旗下的 HC Energy Transition Fund 在最近的资产配置会议中</a:t>
+            </a:r>
+          </a:p>
+          <a:p>
+            <a:r>
+              <a:t>讨论了 机器人 行业的投资机会，并对 图龙信息传媒有限公司</a:t>
             </a:r>
           </a:p>
           <a:p>
@@ -3485,7 +3480,7 @@
           <a:p/>
           <a:p>
             <a:r>
-              <a:t>风险管理部认为，消费科技 行业仍然面临若干</a:t>
+              <a:t>风险管理部认为，医疗科技 行业仍然面临若干</a:t>
             </a:r>
           </a:p>
           <a:p>
@@ -3502,17 +3497,22 @@
           <a:p/>
           <a:p>
             <a:r>
-              <a:t>从产业链角度看，云计算 行业主要由上游设备厂商、</a:t>
-            </a:r>
-          </a:p>
-          <a:p>
-            <a:r>
-              <a:t>中游平台企业以及下游应用厂商组成。</a:t>
-            </a:r>
-          </a:p>
-          <a:p>
-            <a:r>
-              <a:t>国讯网络有限公司 主要位于产业链的 上游 环节。</a:t>
+              <a:t>图龙信息传媒有限公司 是中国 机器人 行业的重要企业之一。</a:t>
+            </a:r>
+          </a:p>
+          <a:p>
+            <a:r>
+              <a:t>根据华辰资本 资产配置委员会 的研究，该公司成立于 2007 年，</a:t>
+            </a:r>
+          </a:p>
+          <a:p>
+            <a:r>
+              <a:t>目前员工规模约 2000 人。公司近年来持续加大研发投入，</a:t>
+            </a:r>
+          </a:p>
+          <a:p>
+            <a:r>
+              <a:t>在核心技术方面形成了较强的竞争壁垒。</a:t>
             </a:r>
           </a:p>
           <a:p/>
@@ -3574,24 +3574,7 @@
           <a:p/>
           <a:p>
             <a:r>
-              <a:t>华辰资本旗下的 HC Quant Arbitrage Fund 在最近的资产配置会议中</a:t>
-            </a:r>
-          </a:p>
-          <a:p>
-            <a:r>
-              <a:t>讨论了 半导体 行业的投资机会，并对 万迅电脑网络有限公司</a:t>
-            </a:r>
-          </a:p>
-          <a:p>
-            <a:r>
-              <a:t>进行了重点评估。</a:t>
-            </a:r>
-          </a:p>
-          <a:p/>
-          <a:p/>
-          <a:p>
-            <a:r>
-              <a:t>风险管理部认为，机器人 行业仍然面临若干</a:t>
+              <a:t>风险管理部认为，消费科技 行业仍然面临若干</a:t>
             </a:r>
           </a:p>
           <a:p>
@@ -3608,17 +3591,39 @@
           <a:p/>
           <a:p>
             <a:r>
-              <a:t>华辰资本旗下的 HC Quant Arbitrage Fund 在最近的资产配置会议中</a:t>
-            </a:r>
-          </a:p>
-          <a:p>
-            <a:r>
-              <a:t>讨论了 云计算 行业的投资机会，并对 国讯网络有限公司</a:t>
-            </a:r>
-          </a:p>
-          <a:p>
-            <a:r>
-              <a:t>进行了重点评估。</a:t>
+              <a:t>昂歌信息信息有限公司 是中国 消费科技 行业的重要企业之一。</a:t>
+            </a:r>
+          </a:p>
+          <a:p>
+            <a:r>
+              <a:t>根据华辰资本 资产配置委员会 的研究，该公司成立于 2010 年，</a:t>
+            </a:r>
+          </a:p>
+          <a:p>
+            <a:r>
+              <a:t>目前员工规模约 7892 人。公司近年来持续加大研发投入，</a:t>
+            </a:r>
+          </a:p>
+          <a:p>
+            <a:r>
+              <a:t>在核心技术方面形成了较强的竞争壁垒。</a:t>
+            </a:r>
+          </a:p>
+          <a:p/>
+          <a:p/>
+          <a:p>
+            <a:r>
+              <a:t>风险管理部认为，人工智能 行业仍然面临若干</a:t>
+            </a:r>
+          </a:p>
+          <a:p>
+            <a:r>
+              <a:t>不确定性因素，包括技术迭代风险、政策变化、</a:t>
+            </a:r>
+          </a:p>
+          <a:p>
+            <a:r>
+              <a:t>以及市场竞争加剧等问题。</a:t>
             </a:r>
           </a:p>
           <a:p/>
@@ -3680,51 +3685,51 @@
           <a:p/>
           <a:p>
             <a:r>
-              <a:t>华辰资本旗下的 HC Quant Arbitrage Fund 在最近的资产配置会议中</a:t>
-            </a:r>
-          </a:p>
-          <a:p>
-            <a:r>
-              <a:t>讨论了 新能源 行业的投资机会，并对 昊嘉网络有限公司</a:t>
+              <a:t>从产业链角度看，消费科技 行业主要由上游设备厂商、</a:t>
+            </a:r>
+          </a:p>
+          <a:p>
+            <a:r>
+              <a:t>中游平台企业以及下游应用厂商组成。</a:t>
+            </a:r>
+          </a:p>
+          <a:p>
+            <a:r>
+              <a:t>方正科技信息有限公司 主要位于产业链的 中游 环节。</a:t>
+            </a:r>
+          </a:p>
+          <a:p/>
+          <a:p/>
+          <a:p>
+            <a:r>
+              <a:t>风险管理部认为，消费科技 行业仍然面临若干</a:t>
+            </a:r>
+          </a:p>
+          <a:p>
+            <a:r>
+              <a:t>不确定性因素，包括技术迭代风险、政策变化、</a:t>
+            </a:r>
+          </a:p>
+          <a:p>
+            <a:r>
+              <a:t>以及市场竞争加剧等问题。</a:t>
+            </a:r>
+          </a:p>
+          <a:p/>
+          <a:p/>
+          <a:p>
+            <a:r>
+              <a:t>华辰资本旗下的 HC Global Macro Fund 在最近的资产配置会议中</a:t>
+            </a:r>
+          </a:p>
+          <a:p>
+            <a:r>
+              <a:t>讨论了 人工智能 行业的投资机会，并对 明腾传媒有限公司</a:t>
             </a:r>
           </a:p>
           <a:p>
             <a:r>
               <a:t>进行了重点评估。</a:t>
-            </a:r>
-          </a:p>
-          <a:p/>
-          <a:p/>
-          <a:p>
-            <a:r>
-              <a:t>风险管理部认为，人工智能 行业仍然面临若干</a:t>
-            </a:r>
-          </a:p>
-          <a:p>
-            <a:r>
-              <a:t>不确定性因素，包括技术迭代风险、政策变化、</a:t>
-            </a:r>
-          </a:p>
-          <a:p>
-            <a:r>
-              <a:t>以及市场竞争加剧等问题。</a:t>
-            </a:r>
-          </a:p>
-          <a:p/>
-          <a:p/>
-          <a:p>
-            <a:r>
-              <a:t>根据内部财务模型测算，济南亿次元网络有限公司 在未来三年</a:t>
-            </a:r>
-          </a:p>
-          <a:p>
-            <a:r>
-              <a:t>收入复合增长率预计可达到 33% 左右。</a:t>
-            </a:r>
-          </a:p>
-          <a:p>
-            <a:r>
-              <a:t>该预测基于行业需求增长以及公司产能扩张计划。</a:t>
             </a:r>
           </a:p>
           <a:p/>
@@ -3786,56 +3791,56 @@
           <a:p/>
           <a:p>
             <a:r>
-              <a:t>风险管理部认为，云计算 行业仍然面临若干</a:t>
-            </a:r>
-          </a:p>
-          <a:p>
-            <a:r>
-              <a:t>不确定性因素，包括技术迭代风险、政策变化、</a:t>
-            </a:r>
-          </a:p>
-          <a:p>
-            <a:r>
-              <a:t>以及市场竞争加剧等问题。</a:t>
-            </a:r>
-          </a:p>
-          <a:p/>
-          <a:p/>
-          <a:p>
-            <a:r>
-              <a:t>风险管理部认为，云计算 行业仍然面临若干</a:t>
-            </a:r>
-          </a:p>
-          <a:p>
-            <a:r>
-              <a:t>不确定性因素，包括技术迭代风险、政策变化、</a:t>
-            </a:r>
-          </a:p>
-          <a:p>
-            <a:r>
-              <a:t>以及市场竞争加剧等问题。</a:t>
-            </a:r>
-          </a:p>
-          <a:p/>
-          <a:p/>
-          <a:p>
-            <a:r>
-              <a:t>迪摩科技有限公司 是中国 人工智能 行业的重要企业之一。</a:t>
-            </a:r>
-          </a:p>
-          <a:p>
-            <a:r>
-              <a:t>根据华辰资本 量化研究部 的研究，该公司成立于 2017 年，</a:t>
-            </a:r>
-          </a:p>
-          <a:p>
-            <a:r>
-              <a:t>目前员工规模约 7554 人。公司近年来持续加大研发投入，</a:t>
+              <a:t>从产业链角度看，新能源 行业主要由上游设备厂商、</a:t>
+            </a:r>
+          </a:p>
+          <a:p>
+            <a:r>
+              <a:t>中游平台企业以及下游应用厂商组成。</a:t>
+            </a:r>
+          </a:p>
+          <a:p>
+            <a:r>
+              <a:t>戴硕电子网络有限公司 主要位于产业链的 下游 环节。</a:t>
+            </a:r>
+          </a:p>
+          <a:p/>
+          <a:p/>
+          <a:p>
+            <a:r>
+              <a:t>良诺科技有限公司 是中国 云计算 行业的重要企业之一。</a:t>
+            </a:r>
+          </a:p>
+          <a:p>
+            <a:r>
+              <a:t>根据华辰资本 风险管理部 的研究，该公司成立于 2016 年，</a:t>
+            </a:r>
+          </a:p>
+          <a:p>
+            <a:r>
+              <a:t>目前员工规模约 1663 人。公司近年来持续加大研发投入，</a:t>
             </a:r>
           </a:p>
           <a:p>
             <a:r>
               <a:t>在核心技术方面形成了较强的竞争壁垒。</a:t>
+            </a:r>
+          </a:p>
+          <a:p/>
+          <a:p/>
+          <a:p>
+            <a:r>
+              <a:t>从产业链角度看，人工智能 行业主要由上游设备厂商、</a:t>
+            </a:r>
+          </a:p>
+          <a:p>
+            <a:r>
+              <a:t>中游平台企业以及下游应用厂商组成。</a:t>
+            </a:r>
+          </a:p>
+          <a:p>
+            <a:r>
+              <a:t>明腾传媒有限公司 主要位于产业链的 上游 环节。</a:t>
             </a:r>
           </a:p>
           <a:p/>
@@ -3897,12 +3902,12 @@
           <a:p/>
           <a:p>
             <a:r>
-              <a:t>根据内部财务模型测算，国讯网络有限公司 在未来三年</a:t>
-            </a:r>
-          </a:p>
-          <a:p>
-            <a:r>
-              <a:t>收入复合增长率预计可达到 21% 左右。</a:t>
+              <a:t>根据内部财务模型测算，创汇传媒有限公司 在未来三年</a:t>
+            </a:r>
+          </a:p>
+          <a:p>
+            <a:r>
+              <a:t>收入复合增长率预计可达到 18% 左右。</a:t>
             </a:r>
           </a:p>
           <a:p>
@@ -3914,7 +3919,24 @@
           <a:p/>
           <a:p>
             <a:r>
-              <a:t>风险管理部认为，半导体 行业仍然面临若干</a:t>
+              <a:t>华辰资本旗下的 HC Global Macro Fund 在最近的资产配置会议中</a:t>
+            </a:r>
+          </a:p>
+          <a:p>
+            <a:r>
+              <a:t>讨论了 半导体 行业的投资机会，并对 雨林木风计算机科技有限公司</a:t>
+            </a:r>
+          </a:p>
+          <a:p>
+            <a:r>
+              <a:t>进行了重点评估。</a:t>
+            </a:r>
+          </a:p>
+          <a:p/>
+          <a:p/>
+          <a:p>
+            <a:r>
+              <a:t>风险管理部认为，消费科技 行业仍然面临若干</a:t>
             </a:r>
           </a:p>
           <a:p>
@@ -3925,23 +3947,6 @@
           <a:p>
             <a:r>
               <a:t>以及市场竞争加剧等问题。</a:t>
-            </a:r>
-          </a:p>
-          <a:p/>
-          <a:p/>
-          <a:p>
-            <a:r>
-              <a:t>根据内部财务模型测算，南康网络有限公司 在未来三年</a:t>
-            </a:r>
-          </a:p>
-          <a:p>
-            <a:r>
-              <a:t>收入复合增长率预计可达到 10% 左右。</a:t>
-            </a:r>
-          </a:p>
-          <a:p>
-            <a:r>
-              <a:t>该预测基于行业需求增长以及公司产能扩张计划。</a:t>
             </a:r>
           </a:p>
           <a:p/>
@@ -4003,56 +4008,51 @@
           <a:p/>
           <a:p>
             <a:r>
-              <a:t>东方峻景传媒有限公司 是中国 新能源 行业的重要企业之一。</a:t>
-            </a:r>
-          </a:p>
-          <a:p>
-            <a:r>
-              <a:t>根据华辰资本 资产配置委员会 的研究，该公司成立于 2013 年，</a:t>
-            </a:r>
-          </a:p>
-          <a:p>
-            <a:r>
-              <a:t>目前员工规模约 6208 人。公司近年来持续加大研发投入，</a:t>
-            </a:r>
-          </a:p>
-          <a:p>
-            <a:r>
-              <a:t>在核心技术方面形成了较强的竞争壁垒。</a:t>
-            </a:r>
-          </a:p>
-          <a:p/>
-          <a:p/>
-          <a:p>
-            <a:r>
-              <a:t>风险管理部认为，半导体 行业仍然面临若干</a:t>
-            </a:r>
-          </a:p>
-          <a:p>
-            <a:r>
-              <a:t>不确定性因素，包括技术迭代风险、政策变化、</a:t>
-            </a:r>
-          </a:p>
-          <a:p>
-            <a:r>
-              <a:t>以及市场竞争加剧等问题。</a:t>
-            </a:r>
-          </a:p>
-          <a:p/>
-          <a:p/>
-          <a:p>
-            <a:r>
-              <a:t>华辰资本旗下的 HC Alpha Growth Fund 在最近的资产配置会议中</a:t>
-            </a:r>
-          </a:p>
-          <a:p>
-            <a:r>
-              <a:t>讨论了 半导体 行业的投资机会，并对 浦华众城科技有限公司</a:t>
+              <a:t>华辰资本旗下的 HC AI Innovation Fund 在最近的资产配置会议中</a:t>
+            </a:r>
+          </a:p>
+          <a:p>
+            <a:r>
+              <a:t>讨论了 新能源 行业的投资机会，并对 创汇传媒有限公司</a:t>
             </a:r>
           </a:p>
           <a:p>
             <a:r>
               <a:t>进行了重点评估。</a:t>
+            </a:r>
+          </a:p>
+          <a:p/>
+          <a:p/>
+          <a:p>
+            <a:r>
+              <a:t>从产业链角度看，半导体 行业主要由上游设备厂商、</a:t>
+            </a:r>
+          </a:p>
+          <a:p>
+            <a:r>
+              <a:t>中游平台企业以及下游应用厂商组成。</a:t>
+            </a:r>
+          </a:p>
+          <a:p>
+            <a:r>
+              <a:t>信诚致远网络有限公司 主要位于产业链的 中游 环节。</a:t>
+            </a:r>
+          </a:p>
+          <a:p/>
+          <a:p/>
+          <a:p>
+            <a:r>
+              <a:t>从产业链角度看，医疗科技 行业主要由上游设备厂商、</a:t>
+            </a:r>
+          </a:p>
+          <a:p>
+            <a:r>
+              <a:t>中游平台企业以及下游应用厂商组成。</a:t>
+            </a:r>
+          </a:p>
+          <a:p>
+            <a:r>
+              <a:t>九方传媒有限公司 主要位于产业链的 中游 环节。</a:t>
             </a:r>
           </a:p>
           <a:p/>
@@ -4114,61 +4114,51 @@
           <a:p/>
           <a:p>
             <a:r>
-              <a:t>创亿网络有限公司 是中国 云计算 行业的重要企业之一。</a:t>
-            </a:r>
-          </a:p>
-          <a:p>
-            <a:r>
-              <a:t>根据华辰资本 投资策略部 的研究，该公司成立于 2010 年，</a:t>
-            </a:r>
-          </a:p>
-          <a:p>
-            <a:r>
-              <a:t>目前员工规模约 4041 人。公司近年来持续加大研发投入，</a:t>
-            </a:r>
-          </a:p>
-          <a:p>
-            <a:r>
-              <a:t>在核心技术方面形成了较强的竞争壁垒。</a:t>
-            </a:r>
-          </a:p>
-          <a:p/>
-          <a:p/>
-          <a:p>
-            <a:r>
-              <a:t>创亿信息有限公司 是中国 医疗科技 行业的重要企业之一。</a:t>
-            </a:r>
-          </a:p>
-          <a:p>
-            <a:r>
-              <a:t>根据华辰资本 量化研究部 的研究，该公司成立于 2007 年，</a:t>
-            </a:r>
-          </a:p>
-          <a:p>
-            <a:r>
-              <a:t>目前员工规模约 7601 人。公司近年来持续加大研发投入，</a:t>
-            </a:r>
-          </a:p>
-          <a:p>
-            <a:r>
-              <a:t>在核心技术方面形成了较强的竞争壁垒。</a:t>
-            </a:r>
-          </a:p>
-          <a:p/>
-          <a:p/>
-          <a:p>
-            <a:r>
-              <a:t>根据内部财务模型测算，天益信息有限公司 在未来三年</a:t>
-            </a:r>
-          </a:p>
-          <a:p>
-            <a:r>
-              <a:t>收入复合增长率预计可达到 12% 左右。</a:t>
-            </a:r>
-          </a:p>
-          <a:p>
-            <a:r>
-              <a:t>该预测基于行业需求增长以及公司产能扩张计划。</a:t>
+              <a:t>华辰资本旗下的 HC Alpha Growth Fund 在最近的资产配置会议中</a:t>
+            </a:r>
+          </a:p>
+          <a:p>
+            <a:r>
+              <a:t>讨论了 消费科技 行业的投资机会，并对 方正科技信息有限公司</a:t>
+            </a:r>
+          </a:p>
+          <a:p>
+            <a:r>
+              <a:t>进行了重点评估。</a:t>
+            </a:r>
+          </a:p>
+          <a:p/>
+          <a:p/>
+          <a:p>
+            <a:r>
+              <a:t>风险管理部认为，机器人 行业仍然面临若干</a:t>
+            </a:r>
+          </a:p>
+          <a:p>
+            <a:r>
+              <a:t>不确定性因素，包括技术迭代风险、政策变化、</a:t>
+            </a:r>
+          </a:p>
+          <a:p>
+            <a:r>
+              <a:t>以及市场竞争加剧等问题。</a:t>
+            </a:r>
+          </a:p>
+          <a:p/>
+          <a:p/>
+          <a:p>
+            <a:r>
+              <a:t>风险管理部认为，医疗科技 行业仍然面临若干</a:t>
+            </a:r>
+          </a:p>
+          <a:p>
+            <a:r>
+              <a:t>不确定性因素，包括技术迭代风险、政策变化、</a:t>
+            </a:r>
+          </a:p>
+          <a:p>
+            <a:r>
+              <a:t>以及市场竞争加剧等问题。</a:t>
             </a:r>
           </a:p>
           <a:p/>
@@ -4230,7 +4220,7 @@
           <a:p/>
           <a:p>
             <a:r>
-              <a:t>风险管理部认为，医疗科技 行业仍然面临若干</a:t>
+              <a:t>风险管理部认为，消费科技 行业仍然面临若干</a:t>
             </a:r>
           </a:p>
           <a:p>
@@ -4247,24 +4237,29 @@
           <a:p/>
           <a:p>
             <a:r>
-              <a:t>华辰资本旗下的 HC Quant Arbitrage Fund 在最近的资产配置会议中</a:t>
-            </a:r>
-          </a:p>
-          <a:p>
-            <a:r>
-              <a:t>讨论了 新能源 行业的投资机会，并对 九方网络有限公司</a:t>
-            </a:r>
-          </a:p>
-          <a:p>
-            <a:r>
-              <a:t>进行了重点评估。</a:t>
-            </a:r>
-          </a:p>
-          <a:p/>
-          <a:p/>
-          <a:p>
-            <a:r>
-              <a:t>从产业链角度看，半导体 行业主要由上游设备厂商、</a:t>
+              <a:t>创联世纪信息有限公司 是中国 云计算 行业的重要企业之一。</a:t>
+            </a:r>
+          </a:p>
+          <a:p>
+            <a:r>
+              <a:t>根据华辰资本 投资委员会 的研究，该公司成立于 2005 年，</a:t>
+            </a:r>
+          </a:p>
+          <a:p>
+            <a:r>
+              <a:t>目前员工规模约 3637 人。公司近年来持续加大研发投入，</a:t>
+            </a:r>
+          </a:p>
+          <a:p>
+            <a:r>
+              <a:t>在核心技术方面形成了较强的竞争壁垒。</a:t>
+            </a:r>
+          </a:p>
+          <a:p/>
+          <a:p/>
+          <a:p>
+            <a:r>
+              <a:t>从产业链角度看，新能源 行业主要由上游设备厂商、</a:t>
             </a:r>
           </a:p>
           <a:p>
@@ -4274,7 +4269,7 @@
           </a:p>
           <a:p>
             <a:r>
-              <a:t>佳禾科技有限公司 主要位于产业链的 上游 环节。</a:t>
+              <a:t>创汇传媒有限公司 主要位于产业链的 下游 环节。</a:t>
             </a:r>
           </a:p>
           <a:p/>
@@ -4336,12 +4331,12 @@
           <a:p/>
           <a:p>
             <a:r>
-              <a:t>根据内部财务模型测算，精芯信息有限公司 在未来三年</a:t>
-            </a:r>
-          </a:p>
-          <a:p>
-            <a:r>
-              <a:t>收入复合增长率预计可达到 12% 左右。</a:t>
+              <a:t>根据内部财务模型测算，鑫博腾飞信息有限公司 在未来三年</a:t>
+            </a:r>
+          </a:p>
+          <a:p>
+            <a:r>
+              <a:t>收入复合增长率预计可达到 23% 左右。</a:t>
             </a:r>
           </a:p>
           <a:p>
@@ -4353,29 +4348,34 @@
           <a:p/>
           <a:p>
             <a:r>
-              <a:t>根据内部财务模型测算，浦华众城科技有限公司 在未来三年</a:t>
-            </a:r>
-          </a:p>
-          <a:p>
-            <a:r>
-              <a:t>收入复合增长率预计可达到 18% 左右。</a:t>
-            </a:r>
-          </a:p>
-          <a:p>
-            <a:r>
-              <a:t>该预测基于行业需求增长以及公司产能扩张计划。</a:t>
-            </a:r>
-          </a:p>
-          <a:p/>
-          <a:p/>
-          <a:p>
-            <a:r>
-              <a:t>根据内部财务模型测算，精芯科技有限公司 在未来三年</a:t>
-            </a:r>
-          </a:p>
-          <a:p>
-            <a:r>
-              <a:t>收入复合增长率预计可达到 14% 左右。</a:t>
+              <a:t>华成育卓科技有限公司 是中国 医疗科技 行业的重要企业之一。</a:t>
+            </a:r>
+          </a:p>
+          <a:p>
+            <a:r>
+              <a:t>根据华辰资本 量化研究部 的研究，该公司成立于 2020 年，</a:t>
+            </a:r>
+          </a:p>
+          <a:p>
+            <a:r>
+              <a:t>目前员工规模约 650 人。公司近年来持续加大研发投入，</a:t>
+            </a:r>
+          </a:p>
+          <a:p>
+            <a:r>
+              <a:t>在核心技术方面形成了较强的竞争壁垒。</a:t>
+            </a:r>
+          </a:p>
+          <a:p/>
+          <a:p/>
+          <a:p>
+            <a:r>
+              <a:t>根据内部财务模型测算，惠派国际公司科技有限公司 在未来三年</a:t>
+            </a:r>
+          </a:p>
+          <a:p>
+            <a:r>
+              <a:t>收入复合增长率预计可达到 16% 左右。</a:t>
             </a:r>
           </a:p>
           <a:p>
@@ -4442,7 +4442,29 @@
           <a:p/>
           <a:p>
             <a:r>
-              <a:t>风险管理部认为，人工智能 行业仍然面临若干</a:t>
+              <a:t>鑫博腾飞信息有限公司 是中国 消费科技 行业的重要企业之一。</a:t>
+            </a:r>
+          </a:p>
+          <a:p>
+            <a:r>
+              <a:t>根据华辰资本 资产配置委员会 的研究，该公司成立于 2016 年，</a:t>
+            </a:r>
+          </a:p>
+          <a:p>
+            <a:r>
+              <a:t>目前员工规模约 4167 人。公司近年来持续加大研发投入，</a:t>
+            </a:r>
+          </a:p>
+          <a:p>
+            <a:r>
+              <a:t>在核心技术方面形成了较强的竞争壁垒。</a:t>
+            </a:r>
+          </a:p>
+          <a:p/>
+          <a:p/>
+          <a:p>
+            <a:r>
+              <a:t>风险管理部认为，新能源 行业仍然面临若干</a:t>
             </a:r>
           </a:p>
           <a:p>
@@ -4459,39 +4481,17 @@
           <a:p/>
           <a:p>
             <a:r>
-              <a:t>根据内部财务模型测算，兰金电子网络有限公司 在未来三年</a:t>
-            </a:r>
-          </a:p>
-          <a:p>
-            <a:r>
-              <a:t>收入复合增长率预计可达到 23% 左右。</a:t>
+              <a:t>根据内部财务模型测算，华成育卓传媒有限公司 在未来三年</a:t>
+            </a:r>
+          </a:p>
+          <a:p>
+            <a:r>
+              <a:t>收入复合增长率预计可达到 27% 左右。</a:t>
             </a:r>
           </a:p>
           <a:p>
             <a:r>
               <a:t>该预测基于行业需求增长以及公司产能扩张计划。</a:t>
-            </a:r>
-          </a:p>
-          <a:p/>
-          <a:p/>
-          <a:p>
-            <a:r>
-              <a:t>东方峻景网络有限公司 是中国 机器人 行业的重要企业之一。</a:t>
-            </a:r>
-          </a:p>
-          <a:p>
-            <a:r>
-              <a:t>根据华辰资本 资产配置委员会 的研究，该公司成立于 2020 年，</a:t>
-            </a:r>
-          </a:p>
-          <a:p>
-            <a:r>
-              <a:t>目前员工规模约 7859 人。公司近年来持续加大研发投入，</a:t>
-            </a:r>
-          </a:p>
-          <a:p>
-            <a:r>
-              <a:t>在核心技术方面形成了较强的竞争壁垒。</a:t>
             </a:r>
           </a:p>
           <a:p/>
@@ -4553,29 +4553,41 @@
           <a:p/>
           <a:p>
             <a:r>
-              <a:t>九方信息有限公司 是中国 新能源 行业的重要企业之一。</a:t>
-            </a:r>
-          </a:p>
-          <a:p>
-            <a:r>
-              <a:t>根据华辰资本 投资委员会 的研究，该公司成立于 2011 年，</a:t>
-            </a:r>
-          </a:p>
-          <a:p>
-            <a:r>
-              <a:t>目前员工规模约 6198 人。公司近年来持续加大研发投入，</a:t>
-            </a:r>
-          </a:p>
-          <a:p>
-            <a:r>
-              <a:t>在核心技术方面形成了较强的竞争壁垒。</a:t>
-            </a:r>
-          </a:p>
-          <a:p/>
-          <a:p/>
-          <a:p>
-            <a:r>
-              <a:t>风险管理部认为，半导体 行业仍然面临若干</a:t>
+              <a:t>华辰资本旗下的 HC AI Innovation Fund 在最近的资产配置会议中</a:t>
+            </a:r>
+          </a:p>
+          <a:p>
+            <a:r>
+              <a:t>讨论了 新能源 行业的投资机会，并对 戴硕电子网络有限公司</a:t>
+            </a:r>
+          </a:p>
+          <a:p>
+            <a:r>
+              <a:t>进行了重点评估。</a:t>
+            </a:r>
+          </a:p>
+          <a:p/>
+          <a:p/>
+          <a:p>
+            <a:r>
+              <a:t>根据内部财务模型测算，信诚致远网络有限公司 在未来三年</a:t>
+            </a:r>
+          </a:p>
+          <a:p>
+            <a:r>
+              <a:t>收入复合增长率预计可达到 21% 左右。</a:t>
+            </a:r>
+          </a:p>
+          <a:p>
+            <a:r>
+              <a:t>该预测基于行业需求增长以及公司产能扩张计划。</a:t>
+            </a:r>
+          </a:p>
+          <a:p/>
+          <a:p/>
+          <a:p>
+            <a:r>
+              <a:t>风险管理部认为，人工智能 行业仍然面临若干</a:t>
             </a:r>
           </a:p>
           <a:p>
@@ -4586,23 +4598,6 @@
           <a:p>
             <a:r>
               <a:t>以及市场竞争加剧等问题。</a:t>
-            </a:r>
-          </a:p>
-          <a:p/>
-          <a:p/>
-          <a:p>
-            <a:r>
-              <a:t>华辰资本旗下的 HC Alpha Growth Fund 在最近的资产配置会议中</a:t>
-            </a:r>
-          </a:p>
-          <a:p>
-            <a:r>
-              <a:t>讨论了 新能源 行业的投资机会，并对 快讯网络有限公司</a:t>
-            </a:r>
-          </a:p>
-          <a:p>
-            <a:r>
-              <a:t>进行了重点评估。</a:t>
             </a:r>
           </a:p>
           <a:p/>
@@ -4664,34 +4659,12 @@
           <a:p/>
           <a:p>
             <a:r>
-              <a:t>和泰传媒有限公司 是中国 消费科技 行业的重要企业之一。</a:t>
-            </a:r>
-          </a:p>
-          <a:p>
-            <a:r>
-              <a:t>根据华辰资本 资产配置委员会 的研究，该公司成立于 2020 年，</a:t>
-            </a:r>
-          </a:p>
-          <a:p>
-            <a:r>
-              <a:t>目前员工规模约 7048 人。公司近年来持续加大研发投入，</a:t>
-            </a:r>
-          </a:p>
-          <a:p>
-            <a:r>
-              <a:t>在核心技术方面形成了较强的竞争壁垒。</a:t>
-            </a:r>
-          </a:p>
-          <a:p/>
-          <a:p/>
-          <a:p>
-            <a:r>
-              <a:t>华辰资本旗下的 HC Energy Transition Fund 在最近的资产配置会议中</a:t>
-            </a:r>
-          </a:p>
-          <a:p>
-            <a:r>
-              <a:t>讨论了 医疗科技 行业的投资机会，并对 凌云网络有限公司</a:t>
+              <a:t>华辰资本旗下的 HC AI Innovation Fund 在最近的资产配置会议中</a:t>
+            </a:r>
+          </a:p>
+          <a:p>
+            <a:r>
+              <a:t>讨论了 消费科技 行业的投资机会，并对 鑫博腾飞信息有限公司</a:t>
             </a:r>
           </a:p>
           <a:p>
@@ -4703,17 +4676,34 @@
           <a:p/>
           <a:p>
             <a:r>
-              <a:t>华辰资本旗下的 HC AI Innovation Fund 在最近的资产配置会议中</a:t>
-            </a:r>
-          </a:p>
-          <a:p>
-            <a:r>
-              <a:t>讨论了 半导体 行业的投资机会，并对 华远软件信息有限公司</a:t>
-            </a:r>
-          </a:p>
-          <a:p>
-            <a:r>
-              <a:t>进行了重点评估。</a:t>
+              <a:t>从产业链角度看，人工智能 行业主要由上游设备厂商、</a:t>
+            </a:r>
+          </a:p>
+          <a:p>
+            <a:r>
+              <a:t>中游平台企业以及下游应用厂商组成。</a:t>
+            </a:r>
+          </a:p>
+          <a:p>
+            <a:r>
+              <a:t>惠派国际公司科技有限公司 主要位于产业链的 下游 环节。</a:t>
+            </a:r>
+          </a:p>
+          <a:p/>
+          <a:p/>
+          <a:p>
+            <a:r>
+              <a:t>从产业链角度看，机器人 行业主要由上游设备厂商、</a:t>
+            </a:r>
+          </a:p>
+          <a:p>
+            <a:r>
+              <a:t>中游平台企业以及下游应用厂商组成。</a:t>
+            </a:r>
+          </a:p>
+          <a:p>
+            <a:r>
+              <a:t>毕博诚信息有限公司 主要位于产业链的 下游 环节。</a:t>
             </a:r>
           </a:p>
           <a:p/>
